--- a/u_sharp/5 DLL.pptx
+++ b/u_sharp/5 DLL.pptx
@@ -5,13 +5,14 @@
     <p:sldMasterId id="2147483648" r:id="rId1"/>
   </p:sldMasterIdLst>
   <p:notesMasterIdLst>
-    <p:notesMasterId r:id="rId6"/>
+    <p:notesMasterId r:id="rId7"/>
   </p:notesMasterIdLst>
   <p:sldIdLst>
     <p:sldId id="256" r:id="rId2"/>
     <p:sldId id="262" r:id="rId3"/>
     <p:sldId id="263" r:id="rId4"/>
     <p:sldId id="274" r:id="rId5"/>
+    <p:sldId id="275" r:id="rId6"/>
   </p:sldIdLst>
   <p:sldSz cx="9144000" cy="6858000" type="screen4x3"/>
   <p:notesSz cx="6858000" cy="9144000"/>
@@ -196,7 +197,7 @@
             <a:fld id="{D64E5A87-3B20-4600-9DCE-BE5A8D5CFD98}" type="datetimeFigureOut">
               <a:rPr lang="ru-RU" smtClean="0"/>
               <a:pPr/>
-              <a:t>09.04.2026</a:t>
+              <a:t>14.04.2026</a:t>
             </a:fld>
             <a:endParaRPr lang="ru-RU"/>
           </a:p>
@@ -644,7 +645,7 @@
             <a:fld id="{A302F159-6E30-49ED-809A-AF4C5E7BA22D}" type="datetimeFigureOut">
               <a:rPr lang="ru-RU" smtClean="0"/>
               <a:pPr/>
-              <a:t>09.04.2026</a:t>
+              <a:t>14.04.2026</a:t>
             </a:fld>
             <a:endParaRPr lang="ru-RU"/>
           </a:p>
@@ -811,7 +812,7 @@
             <a:fld id="{A302F159-6E30-49ED-809A-AF4C5E7BA22D}" type="datetimeFigureOut">
               <a:rPr lang="ru-RU" smtClean="0"/>
               <a:pPr/>
-              <a:t>09.04.2026</a:t>
+              <a:t>14.04.2026</a:t>
             </a:fld>
             <a:endParaRPr lang="ru-RU"/>
           </a:p>
@@ -988,7 +989,7 @@
             <a:fld id="{A302F159-6E30-49ED-809A-AF4C5E7BA22D}" type="datetimeFigureOut">
               <a:rPr lang="ru-RU" smtClean="0"/>
               <a:pPr/>
-              <a:t>09.04.2026</a:t>
+              <a:t>14.04.2026</a:t>
             </a:fld>
             <a:endParaRPr lang="ru-RU"/>
           </a:p>
@@ -1155,7 +1156,7 @@
             <a:fld id="{A302F159-6E30-49ED-809A-AF4C5E7BA22D}" type="datetimeFigureOut">
               <a:rPr lang="ru-RU" smtClean="0"/>
               <a:pPr/>
-              <a:t>09.04.2026</a:t>
+              <a:t>14.04.2026</a:t>
             </a:fld>
             <a:endParaRPr lang="ru-RU"/>
           </a:p>
@@ -1398,7 +1399,7 @@
             <a:fld id="{A302F159-6E30-49ED-809A-AF4C5E7BA22D}" type="datetimeFigureOut">
               <a:rPr lang="ru-RU" smtClean="0"/>
               <a:pPr/>
-              <a:t>09.04.2026</a:t>
+              <a:t>14.04.2026</a:t>
             </a:fld>
             <a:endParaRPr lang="ru-RU"/>
           </a:p>
@@ -1683,7 +1684,7 @@
             <a:fld id="{A302F159-6E30-49ED-809A-AF4C5E7BA22D}" type="datetimeFigureOut">
               <a:rPr lang="ru-RU" smtClean="0"/>
               <a:pPr/>
-              <a:t>09.04.2026</a:t>
+              <a:t>14.04.2026</a:t>
             </a:fld>
             <a:endParaRPr lang="ru-RU"/>
           </a:p>
@@ -2102,7 +2103,7 @@
             <a:fld id="{A302F159-6E30-49ED-809A-AF4C5E7BA22D}" type="datetimeFigureOut">
               <a:rPr lang="ru-RU" smtClean="0"/>
               <a:pPr/>
-              <a:t>09.04.2026</a:t>
+              <a:t>14.04.2026</a:t>
             </a:fld>
             <a:endParaRPr lang="ru-RU"/>
           </a:p>
@@ -2217,7 +2218,7 @@
             <a:fld id="{A302F159-6E30-49ED-809A-AF4C5E7BA22D}" type="datetimeFigureOut">
               <a:rPr lang="ru-RU" smtClean="0"/>
               <a:pPr/>
-              <a:t>09.04.2026</a:t>
+              <a:t>14.04.2026</a:t>
             </a:fld>
             <a:endParaRPr lang="ru-RU"/>
           </a:p>
@@ -2309,7 +2310,7 @@
             <a:fld id="{A302F159-6E30-49ED-809A-AF4C5E7BA22D}" type="datetimeFigureOut">
               <a:rPr lang="ru-RU" smtClean="0"/>
               <a:pPr/>
-              <a:t>09.04.2026</a:t>
+              <a:t>14.04.2026</a:t>
             </a:fld>
             <a:endParaRPr lang="ru-RU"/>
           </a:p>
@@ -2583,7 +2584,7 @@
             <a:fld id="{A302F159-6E30-49ED-809A-AF4C5E7BA22D}" type="datetimeFigureOut">
               <a:rPr lang="ru-RU" smtClean="0"/>
               <a:pPr/>
-              <a:t>09.04.2026</a:t>
+              <a:t>14.04.2026</a:t>
             </a:fld>
             <a:endParaRPr lang="ru-RU"/>
           </a:p>
@@ -2833,7 +2834,7 @@
             <a:fld id="{A302F159-6E30-49ED-809A-AF4C5E7BA22D}" type="datetimeFigureOut">
               <a:rPr lang="ru-RU" smtClean="0"/>
               <a:pPr/>
-              <a:t>09.04.2026</a:t>
+              <a:t>14.04.2026</a:t>
             </a:fld>
             <a:endParaRPr lang="ru-RU"/>
           </a:p>
@@ -3043,7 +3044,7 @@
             <a:fld id="{A302F159-6E30-49ED-809A-AF4C5E7BA22D}" type="datetimeFigureOut">
               <a:rPr lang="ru-RU" smtClean="0"/>
               <a:pPr/>
-              <a:t>09.04.2026</a:t>
+              <a:t>14.04.2026</a:t>
             </a:fld>
             <a:endParaRPr lang="ru-RU"/>
           </a:p>
@@ -3533,14 +3534,7 @@
                 <a:latin typeface="Cambria" pitchFamily="18" charset="0"/>
                 <a:hlinkClick r:id="rId2"/>
               </a:rPr>
-              <a:t>https://</a:t>
-            </a:r>
-            <a:r>
-              <a:rPr lang="en-US" sz="2400" b="1" dirty="0" smtClean="0">
-                <a:latin typeface="Cambria" pitchFamily="18" charset="0"/>
-                <a:hlinkClick r:id="rId2"/>
-              </a:rPr>
-              <a:t>proglib.io/p/7-sposobov-sortirovki-massivov-na-primere-s-s-illyustraciyami-2022-04-20?ysclid=mi06gtm7tq188590613</a:t>
+              <a:t>https://proglib.io/p/7-sposobov-sortirovki-massivov-na-primere-s-s-illyustraciyami-2022-04-20?ysclid=mi06gtm7tq188590613</a:t>
             </a:r>
             <a:endParaRPr lang="en-US" sz="2400" b="1" dirty="0" smtClean="0">
               <a:latin typeface="Cambria" pitchFamily="18" charset="0"/>
@@ -3589,14 +3583,7 @@
                 <a:latin typeface="Cambria" pitchFamily="18" charset="0"/>
                 <a:hlinkClick r:id="rId3"/>
               </a:rPr>
-              <a:t>https://</a:t>
-            </a:r>
-            <a:r>
-              <a:rPr lang="en-US" sz="2400" b="1" dirty="0" smtClean="0">
-                <a:latin typeface="Cambria" pitchFamily="18" charset="0"/>
-                <a:hlinkClick r:id="rId3"/>
-              </a:rPr>
-              <a:t>metanit.com/sharp/tutorial/3.46.php?ysclid=mnru0i5i9z703753094</a:t>
+              <a:t>https://metanit.com/sharp/tutorial/3.46.php?ysclid=mnru0i5i9z703753094</a:t>
             </a:r>
             <a:endParaRPr lang="en-US" sz="2400" b="1" dirty="0" smtClean="0">
               <a:latin typeface="Cambria" pitchFamily="18" charset="0"/>
@@ -3795,14 +3782,7 @@
                 <a:latin typeface="Times New Roman" pitchFamily="18" charset="0"/>
                 <a:cs typeface="Times New Roman" pitchFamily="18" charset="0"/>
               </a:rPr>
-              <a:t>DLL использует динамическое связывание — программу не нужно компилировать и связывать с библиотекой, связывание происходит во время выполнения. Это достигается с помощью таблиц импорта и экспорта, которые управляют доступом к функциям и переменным между приложением и DLL</a:t>
-            </a:r>
-            <a:r>
-              <a:rPr lang="ru-RU" sz="1700" dirty="0" smtClean="0">
-                <a:latin typeface="Times New Roman" pitchFamily="18" charset="0"/>
-                <a:cs typeface="Times New Roman" pitchFamily="18" charset="0"/>
-              </a:rPr>
-              <a:t>.</a:t>
+              <a:t>DLL использует динамическое связывание — программу не нужно компилировать и связывать с библиотекой, связывание происходит во время выполнения. Это достигается с помощью таблиц импорта и экспорта, которые управляют доступом к функциям и переменным между приложением и DLL.</a:t>
             </a:r>
             <a:endParaRPr lang="en-US" sz="1700" dirty="0" smtClean="0">
               <a:latin typeface="Times New Roman" pitchFamily="18" charset="0"/>
@@ -3854,19 +3834,8 @@
                 <a:latin typeface="Times New Roman" pitchFamily="18" charset="0"/>
                 <a:cs typeface="Times New Roman" pitchFamily="18" charset="0"/>
               </a:rPr>
-              <a:t>) как части проекта. В этом случае DLL загружается в память при запуске приложения</a:t>
-            </a:r>
-            <a:r>
-              <a:rPr lang="ru-RU" sz="1700" dirty="0" smtClean="0">
-                <a:latin typeface="Times New Roman" pitchFamily="18" charset="0"/>
-                <a:cs typeface="Times New Roman" pitchFamily="18" charset="0"/>
-              </a:rPr>
-              <a:t>.</a:t>
-            </a:r>
-            <a:endParaRPr lang="ru-RU" sz="1700" dirty="0" smtClean="0">
-              <a:latin typeface="Times New Roman" pitchFamily="18" charset="0"/>
-              <a:cs typeface="Times New Roman" pitchFamily="18" charset="0"/>
-            </a:endParaRPr>
+              <a:t>) как части проекта. В этом случае DLL загружается в память при запуске приложения.</a:t>
+            </a:r>
           </a:p>
           <a:p>
             <a:pPr algn="just"/>
@@ -3882,19 +3851,8 @@
                 <a:latin typeface="Times New Roman" pitchFamily="18" charset="0"/>
                 <a:cs typeface="Times New Roman" pitchFamily="18" charset="0"/>
               </a:rPr>
-              <a:t> — DLL может загружаться и выгружаться при необходимости. В этом случае приложение предъявляет меньше требований к ресурсам, но обращение к функциям DLL несколько усложнено</a:t>
-            </a:r>
-            <a:r>
-              <a:rPr lang="ru-RU" sz="1700" dirty="0" smtClean="0">
-                <a:latin typeface="Times New Roman" pitchFamily="18" charset="0"/>
-                <a:cs typeface="Times New Roman" pitchFamily="18" charset="0"/>
-              </a:rPr>
-              <a:t>.</a:t>
-            </a:r>
-            <a:endParaRPr lang="ru-RU" sz="1700" dirty="0" smtClean="0">
-              <a:latin typeface="Times New Roman" pitchFamily="18" charset="0"/>
-              <a:cs typeface="Times New Roman" pitchFamily="18" charset="0"/>
-            </a:endParaRPr>
+              <a:t> — DLL может загружаться и выгружаться при необходимости. В этом случае приложение предъявляет меньше требований к ресурсам, но обращение к функциям DLL несколько усложнено.</a:t>
+            </a:r>
           </a:p>
           <a:p>
             <a:pPr algn="just"/>
@@ -4235,6 +4193,282 @@
           </a:p>
         </p:txBody>
       </p:sp>
+    </p:spTree>
+  </p:cSld>
+  <p:clrMapOvr>
+    <a:masterClrMapping/>
+  </p:clrMapOvr>
+</p:sld>
+</file>
+
+<file path=ppt/slides/slide5.xml><?xml version="1.0" encoding="utf-8"?>
+<p:sld xmlns:a="http://schemas.openxmlformats.org/drawingml/2006/main" xmlns:r="http://schemas.openxmlformats.org/officeDocument/2006/relationships" xmlns:p="http://schemas.openxmlformats.org/presentationml/2006/main">
+  <p:cSld>
+    <p:spTree>
+      <p:nvGrpSpPr>
+        <p:cNvPr id="1" name=""/>
+        <p:cNvGrpSpPr/>
+        <p:nvPr/>
+      </p:nvGrpSpPr>
+      <p:grpSpPr>
+        <a:xfrm>
+          <a:off x="0" y="0"/>
+          <a:ext cx="0" cy="0"/>
+          <a:chOff x="0" y="0"/>
+          <a:chExt cx="0" cy="0"/>
+        </a:xfrm>
+      </p:grpSpPr>
+      <p:sp>
+        <p:nvSpPr>
+          <p:cNvPr id="2" name="Заголовок 1"/>
+          <p:cNvSpPr>
+            <a:spLocks noGrp="1"/>
+          </p:cNvSpPr>
+          <p:nvPr>
+            <p:ph type="title"/>
+          </p:nvPr>
+        </p:nvSpPr>
+        <p:spPr>
+          <a:xfrm>
+            <a:off x="428596" y="0"/>
+            <a:ext cx="8229600" cy="1143000"/>
+          </a:xfrm>
+        </p:spPr>
+        <p:txBody>
+          <a:bodyPr/>
+          <a:lstStyle/>
+          <a:p>
+            <a:r>
+              <a:rPr lang="en-US" dirty="0" smtClean="0"/>
+              <a:t>DLL: </a:t>
+            </a:r>
+            <a:r>
+              <a:rPr lang="ru-RU" dirty="0" smtClean="0"/>
+              <a:t>виды подключений</a:t>
+            </a:r>
+            <a:endParaRPr lang="ru-RU" dirty="0"/>
+          </a:p>
+        </p:txBody>
+      </p:sp>
+      <p:sp>
+        <p:nvSpPr>
+          <p:cNvPr id="3" name="Прямоугольник 2"/>
+          <p:cNvSpPr/>
+          <p:nvPr/>
+        </p:nvSpPr>
+        <p:spPr>
+          <a:xfrm>
+            <a:off x="0" y="857232"/>
+            <a:ext cx="9144000" cy="5078313"/>
+          </a:xfrm>
+          <a:prstGeom prst="rect">
+            <a:avLst/>
+          </a:prstGeom>
+        </p:spPr>
+        <p:txBody>
+          <a:bodyPr wrap="square">
+            <a:spAutoFit/>
+          </a:bodyPr>
+          <a:lstStyle/>
+          <a:p>
+            <a:pPr algn="just"/>
+            <a:r>
+              <a:rPr lang="ru-RU" dirty="0" smtClean="0">
+                <a:latin typeface="Times New Roman" pitchFamily="18" charset="0"/>
+                <a:cs typeface="Times New Roman" pitchFamily="18" charset="0"/>
+              </a:rPr>
+              <a:t>Библиотека DLL может быть подключена к приложению </a:t>
+            </a:r>
+          </a:p>
+          <a:p>
+            <a:pPr algn="just"/>
+            <a:endParaRPr lang="ru-RU" dirty="0" smtClean="0">
+              <a:latin typeface="Times New Roman" pitchFamily="18" charset="0"/>
+              <a:cs typeface="Times New Roman" pitchFamily="18" charset="0"/>
+            </a:endParaRPr>
+          </a:p>
+          <a:p>
+            <a:pPr algn="just"/>
+            <a:r>
+              <a:rPr lang="ru-RU" b="1" dirty="0" smtClean="0">
+                <a:latin typeface="Times New Roman" pitchFamily="18" charset="0"/>
+                <a:cs typeface="Times New Roman" pitchFamily="18" charset="0"/>
+              </a:rPr>
+              <a:t>Статически</a:t>
+            </a:r>
+            <a:r>
+              <a:rPr lang="ru-RU" dirty="0" smtClean="0">
+                <a:latin typeface="Times New Roman" pitchFamily="18" charset="0"/>
+                <a:cs typeface="Times New Roman" pitchFamily="18" charset="0"/>
+              </a:rPr>
+              <a:t> — при сборке последнего путём указания соответствующей библиотеки (</a:t>
+            </a:r>
+            <a:r>
+              <a:rPr lang="ru-RU" dirty="0" err="1" smtClean="0">
+                <a:latin typeface="Times New Roman" pitchFamily="18" charset="0"/>
+                <a:cs typeface="Times New Roman" pitchFamily="18" charset="0"/>
+              </a:rPr>
+              <a:t>lib</a:t>
+            </a:r>
+            <a:r>
+              <a:rPr lang="ru-RU" dirty="0" smtClean="0">
+                <a:latin typeface="Times New Roman" pitchFamily="18" charset="0"/>
+                <a:cs typeface="Times New Roman" pitchFamily="18" charset="0"/>
+              </a:rPr>
+              <a:t>) как части проекта. В этом случае DLL загружается в память при запуске приложения.</a:t>
+            </a:r>
+          </a:p>
+          <a:p>
+            <a:pPr algn="just"/>
+            <a:endParaRPr lang="ru-RU" dirty="0" smtClean="0">
+              <a:latin typeface="Times New Roman" pitchFamily="18" charset="0"/>
+              <a:cs typeface="Times New Roman" pitchFamily="18" charset="0"/>
+            </a:endParaRPr>
+          </a:p>
+          <a:p>
+            <a:pPr algn="just"/>
+            <a:endParaRPr lang="ru-RU" dirty="0" smtClean="0">
+              <a:latin typeface="Times New Roman" pitchFamily="18" charset="0"/>
+              <a:cs typeface="Times New Roman" pitchFamily="18" charset="0"/>
+            </a:endParaRPr>
+          </a:p>
+          <a:p>
+            <a:pPr algn="just"/>
+            <a:endParaRPr lang="ru-RU" dirty="0" smtClean="0">
+              <a:latin typeface="Times New Roman" pitchFamily="18" charset="0"/>
+              <a:cs typeface="Times New Roman" pitchFamily="18" charset="0"/>
+            </a:endParaRPr>
+          </a:p>
+          <a:p>
+            <a:pPr algn="just"/>
+            <a:endParaRPr lang="ru-RU" dirty="0" smtClean="0">
+              <a:latin typeface="Times New Roman" pitchFamily="18" charset="0"/>
+              <a:cs typeface="Times New Roman" pitchFamily="18" charset="0"/>
+            </a:endParaRPr>
+          </a:p>
+          <a:p>
+            <a:pPr algn="just"/>
+            <a:endParaRPr lang="ru-RU" dirty="0" smtClean="0">
+              <a:latin typeface="Times New Roman" pitchFamily="18" charset="0"/>
+              <a:cs typeface="Times New Roman" pitchFamily="18" charset="0"/>
+            </a:endParaRPr>
+          </a:p>
+          <a:p>
+            <a:pPr algn="just"/>
+            <a:r>
+              <a:rPr lang="ru-RU" b="1" dirty="0" smtClean="0">
+                <a:latin typeface="Times New Roman" pitchFamily="18" charset="0"/>
+                <a:cs typeface="Times New Roman" pitchFamily="18" charset="0"/>
+              </a:rPr>
+              <a:t>Динамически</a:t>
+            </a:r>
+            <a:r>
+              <a:rPr lang="ru-RU" dirty="0" smtClean="0">
+                <a:latin typeface="Times New Roman" pitchFamily="18" charset="0"/>
+                <a:cs typeface="Times New Roman" pitchFamily="18" charset="0"/>
+              </a:rPr>
+              <a:t> — DLL может загружаться и выгружаться при необходимости. В этом случае приложение предъявляет меньше требований к ресурсам, но обращение к функциям DLL несколько усложнено.</a:t>
+            </a:r>
+          </a:p>
+          <a:p>
+            <a:pPr algn="just"/>
+            <a:endParaRPr lang="ru-RU" dirty="0" smtClean="0">
+              <a:latin typeface="Times New Roman" pitchFamily="18" charset="0"/>
+              <a:cs typeface="Times New Roman" pitchFamily="18" charset="0"/>
+            </a:endParaRPr>
+          </a:p>
+          <a:p>
+            <a:pPr algn="just"/>
+            <a:endParaRPr lang="ru-RU" dirty="0" smtClean="0">
+              <a:latin typeface="Times New Roman" pitchFamily="18" charset="0"/>
+              <a:cs typeface="Times New Roman" pitchFamily="18" charset="0"/>
+            </a:endParaRPr>
+          </a:p>
+          <a:p>
+            <a:pPr algn="just"/>
+            <a:r>
+              <a:rPr lang="ru-RU" dirty="0" smtClean="0">
+                <a:latin typeface="Times New Roman" pitchFamily="18" charset="0"/>
+                <a:cs typeface="Times New Roman" pitchFamily="18" charset="0"/>
+              </a:rPr>
+              <a:t>Важно: при статическом связывании программа не может начать работу без DLL, в то время как при динамическом связывании наличие DLL для запуска приложения не обязательно.</a:t>
+            </a:r>
+          </a:p>
+          <a:p>
+            <a:pPr algn="just"/>
+            <a:endParaRPr lang="ru-RU" dirty="0">
+              <a:latin typeface="Times New Roman" pitchFamily="18" charset="0"/>
+              <a:cs typeface="Times New Roman" pitchFamily="18" charset="0"/>
+            </a:endParaRPr>
+          </a:p>
+        </p:txBody>
+      </p:sp>
+      <p:pic>
+        <p:nvPicPr>
+          <p:cNvPr id="1026" name="Picture 2"/>
+          <p:cNvPicPr>
+            <a:picLocks noChangeAspect="1" noChangeArrowheads="1"/>
+          </p:cNvPicPr>
+          <p:nvPr/>
+        </p:nvPicPr>
+        <p:blipFill>
+          <a:blip r:embed="rId2"/>
+          <a:srcRect/>
+          <a:stretch>
+            <a:fillRect/>
+          </a:stretch>
+        </p:blipFill>
+        <p:spPr bwMode="auto">
+          <a:xfrm>
+            <a:off x="2285984" y="4214818"/>
+            <a:ext cx="4714908" cy="476098"/>
+          </a:xfrm>
+          <a:prstGeom prst="rect">
+            <a:avLst/>
+          </a:prstGeom>
+          <a:noFill/>
+          <a:ln w="9525">
+            <a:noFill/>
+            <a:miter lim="800000"/>
+            <a:headEnd/>
+            <a:tailEnd/>
+          </a:ln>
+          <a:effectLst/>
+        </p:spPr>
+      </p:pic>
+      <p:pic>
+        <p:nvPicPr>
+          <p:cNvPr id="1027" name="Picture 3"/>
+          <p:cNvPicPr>
+            <a:picLocks noChangeAspect="1" noChangeArrowheads="1"/>
+          </p:cNvPicPr>
+          <p:nvPr/>
+        </p:nvPicPr>
+        <p:blipFill>
+          <a:blip r:embed="rId3"/>
+          <a:srcRect/>
+          <a:stretch>
+            <a:fillRect/>
+          </a:stretch>
+        </p:blipFill>
+        <p:spPr bwMode="auto">
+          <a:xfrm>
+            <a:off x="3500430" y="2000240"/>
+            <a:ext cx="2209798" cy="1290455"/>
+          </a:xfrm>
+          <a:prstGeom prst="rect">
+            <a:avLst/>
+          </a:prstGeom>
+          <a:noFill/>
+          <a:ln w="9525">
+            <a:noFill/>
+            <a:miter lim="800000"/>
+            <a:headEnd/>
+            <a:tailEnd/>
+          </a:ln>
+          <a:effectLst/>
+        </p:spPr>
+      </p:pic>
     </p:spTree>
   </p:cSld>
   <p:clrMapOvr>
